--- a/Livrables/Recit-Mission2/Impact_Adoption-IA_1-slide.pptx
+++ b/Livrables/Recit-Mission2/Impact_Adoption-IA_1-slide.pptx
@@ -3090,14 +3090,159 @@
       <p:grpSpPr/>
       <p:sp>
         <p:nvSpPr>
-          <p:cNvPr id="2" name="Rectangle 1"/>
+          <p:cNvPr id="2" name="TextBox 1"/>
+          <p:cNvSpPr txBox="1"/>
+          <p:nvPr/>
+        </p:nvSpPr>
+        <p:spPr>
+          <a:xfrm>
+            <a:off x="548640" y="292608"/>
+            <a:ext cx="10058400" cy="228600"/>
+          </a:xfrm>
+          <a:prstGeom prst="rect">
+            <a:avLst/>
+          </a:prstGeom>
+          <a:noFill/>
+        </p:spPr>
+        <p:txBody>
+          <a:bodyPr wrap="square">
+            <a:spAutoFit/>
+          </a:bodyPr>
+          <a:lstStyle/>
+          <a:p>
+            <a:pPr algn="l">
+              <a:lnSpc>
+                <a:spcPct val="115000"/>
+              </a:lnSpc>
+              <a:spcAft>
+                <a:spcPts val="400"/>
+              </a:spcAft>
+            </a:pPr>
+            <a:r>
+              <a:rPr sz="950" b="1">
+                <a:solidFill>
+                  <a:srgbClr val="000091"/>
+                </a:solidFill>
+                <a:latin typeface="Marianne"/>
+              </a:rPr>
+              <a:t>TRANSFORMATION IA · MINISTÈRES SOCIAUX · SEMAINE DU 10 AU 14 AOÛT 2026</a:t>
+            </a:r>
+          </a:p>
+        </p:txBody>
+      </p:sp>
+      <p:sp>
+        <p:nvSpPr>
+          <p:cNvPr id="3" name="TextBox 2"/>
+          <p:cNvSpPr txBox="1"/>
+          <p:nvPr/>
+        </p:nvSpPr>
+        <p:spPr>
+          <a:xfrm>
+            <a:off x="548640" y="530352"/>
+            <a:ext cx="9692640" cy="502920"/>
+          </a:xfrm>
+          <a:prstGeom prst="rect">
+            <a:avLst/>
+          </a:prstGeom>
+          <a:noFill/>
+        </p:spPr>
+        <p:txBody>
+          <a:bodyPr wrap="square">
+            <a:spAutoFit/>
+          </a:bodyPr>
+          <a:lstStyle/>
+          <a:p>
+            <a:pPr algn="l">
+              <a:lnSpc>
+                <a:spcPct val="115000"/>
+              </a:lnSpc>
+              <a:spcAft>
+                <a:spcPts val="400"/>
+              </a:spcAft>
+            </a:pPr>
+            <a:r>
+              <a:rPr sz="2600" b="1">
+                <a:solidFill>
+                  <a:srgbClr val="000091"/>
+                </a:solidFill>
+                <a:latin typeface="Marianne"/>
+              </a:rPr>
+              <a:t>De l'usage individuel à l'adoption par les équipes</a:t>
+            </a:r>
+          </a:p>
+        </p:txBody>
+      </p:sp>
+      <p:sp>
+        <p:nvSpPr>
+          <p:cNvPr id="4" name="TextBox 3"/>
+          <p:cNvSpPr txBox="1"/>
+          <p:nvPr/>
+        </p:nvSpPr>
+        <p:spPr>
+          <a:xfrm>
+            <a:off x="9692640" y="384048"/>
+            <a:ext cx="1965960" cy="731520"/>
+          </a:xfrm>
+          <a:prstGeom prst="rect">
+            <a:avLst/>
+          </a:prstGeom>
+          <a:noFill/>
+        </p:spPr>
+        <p:txBody>
+          <a:bodyPr wrap="square">
+            <a:spAutoFit/>
+          </a:bodyPr>
+          <a:lstStyle/>
+          <a:p>
+            <a:pPr algn="r">
+              <a:lnSpc>
+                <a:spcPct val="115000"/>
+              </a:lnSpc>
+              <a:spcAft>
+                <a:spcPts val="200"/>
+              </a:spcAft>
+            </a:pPr>
+            <a:r>
+              <a:rPr sz="850" b="0">
+                <a:solidFill>
+                  <a:srgbClr val="666666"/>
+                </a:solidFill>
+                <a:latin typeface="Marianne"/>
+              </a:rPr>
+              <a:t>Une acculturation réelle aux rôles et aux métiers — pas des démos.</a:t>
+            </a:r>
+          </a:p>
+          <a:p>
+            <a:pPr algn="r">
+              <a:lnSpc>
+                <a:spcPct val="115000"/>
+              </a:lnSpc>
+              <a:spcAft>
+                <a:spcPts val="200"/>
+              </a:spcAft>
+            </a:pPr>
+            <a:r>
+              <a:rPr sz="850" b="0">
+                <a:solidFill>
+                  <a:srgbClr val="666666"/>
+                </a:solidFill>
+                <a:latin typeface="Marianne"/>
+              </a:rPr>
+              <a:t>Impact · Ippon Technologies</a:t>
+            </a:r>
+          </a:p>
+        </p:txBody>
+      </p:sp>
+      <p:sp>
+        <p:nvSpPr>
+          <p:cNvPr id="5" name="Rectangle 4"/>
           <p:cNvSpPr/>
           <p:nvPr/>
         </p:nvSpPr>
         <p:spPr>
           <a:xfrm>
-            <a:off x="502920" y="502920"/>
-            <a:ext cx="11201400" cy="41148"/>
+            <a:off x="548640" y="1170432"/>
+            <a:ext cx="11109960" cy="18288"/>
           </a:xfrm>
           <a:prstGeom prst="rect">
             <a:avLst/>
@@ -3134,14 +3279,14 @@
       </p:sp>
       <p:sp>
         <p:nvSpPr>
-          <p:cNvPr id="3" name="TextBox 2"/>
+          <p:cNvPr id="6" name="TextBox 5"/>
           <p:cNvSpPr txBox="1"/>
           <p:nvPr/>
         </p:nvSpPr>
         <p:spPr>
           <a:xfrm>
-            <a:off x="502920" y="731520"/>
-            <a:ext cx="10058400" cy="365760"/>
+            <a:off x="548640" y="1298448"/>
+            <a:ext cx="11109960" cy="548640"/>
           </a:xfrm>
           <a:prstGeom prst="rect">
             <a:avLst/>
@@ -3149,119 +3294,59 @@
           <a:noFill/>
         </p:spPr>
         <p:txBody>
-          <a:bodyPr wrap="square" lIns="0" rIns="0" tIns="0" bIns="0">
+          <a:bodyPr wrap="square">
             <a:spAutoFit/>
           </a:bodyPr>
           <a:lstStyle/>
           <a:p>
             <a:pPr algn="l">
+              <a:lnSpc>
+                <a:spcPct val="115000"/>
+              </a:lnSpc>
               <a:spcAft>
-                <a:spcPts val="600"/>
+                <a:spcPts val="400"/>
               </a:spcAft>
             </a:pPr>
             <a:r>
-              <a:rPr sz="1300" b="1">
-                <a:solidFill>
-                  <a:srgbClr val="7F7FC8"/>
-                </a:solidFill>
-                <a:latin typeface="Marianne"/>
-              </a:rPr>
-              <a:t>TRANSFORMATION IA · MINISTÈRES SOCIAUX · SEMAINE DU 3 AU 7 AOÛT 2026</a:t>
-            </a:r>
-          </a:p>
-        </p:txBody>
-      </p:sp>
-      <p:sp>
-        <p:nvSpPr>
-          <p:cNvPr id="4" name="TextBox 3"/>
-          <p:cNvSpPr txBox="1"/>
+              <a:rPr sz="1200" b="0">
+                <a:solidFill>
+                  <a:srgbClr val="2B2B2B"/>
+                </a:solidFill>
+                <a:latin typeface="Marianne"/>
+              </a:rPr>
+              <a:t>Le sujet n'est pas d'installer un outil, mais de </a:t>
+            </a:r>
+            <a:r>
+              <a:rPr sz="1200" b="1">
+                <a:solidFill>
+                  <a:srgbClr val="000091"/>
+                </a:solidFill>
+                <a:latin typeface="Marianne"/>
+              </a:rPr>
+              <a:t>faire de l'IA une vraie pratique d'équipe</a:t>
+            </a:r>
+            <a:r>
+              <a:rPr sz="1200" b="0">
+                <a:solidFill>
+                  <a:srgbClr val="2B2B2B"/>
+                </a:solidFill>
+                <a:latin typeface="Marianne"/>
+              </a:rPr>
+              <a:t> : on accompagne chaque rôle sur son métier, on lève les freins (outillage interne, souveraineté), et la demande devient entrante — les équipes viennent nous chercher.</a:t>
+            </a:r>
+          </a:p>
+        </p:txBody>
+      </p:sp>
+      <p:sp>
+        <p:nvSpPr>
+          <p:cNvPr id="7" name="Rectangle 6"/>
+          <p:cNvSpPr/>
           <p:nvPr/>
         </p:nvSpPr>
         <p:spPr>
           <a:xfrm>
-            <a:off x="10424160" y="658368"/>
-            <a:ext cx="1280160" cy="365760"/>
-          </a:xfrm>
-          <a:prstGeom prst="rect">
-            <a:avLst/>
-          </a:prstGeom>
-          <a:noFill/>
-        </p:spPr>
-        <p:txBody>
-          <a:bodyPr wrap="square" lIns="0" rIns="0" tIns="0" bIns="0">
-            <a:spAutoFit/>
-          </a:bodyPr>
-          <a:lstStyle/>
-          <a:p>
-            <a:pPr algn="r">
-              <a:spcAft>
-                <a:spcPts val="600"/>
-              </a:spcAft>
-            </a:pPr>
-            <a:r>
-              <a:rPr sz="1200" b="1">
-                <a:solidFill>
-                  <a:srgbClr val="7F7FC8"/>
-                </a:solidFill>
-                <a:latin typeface="Marianne"/>
-              </a:rPr>
-              <a:t>Impact</a:t>
-            </a:r>
-          </a:p>
-        </p:txBody>
-      </p:sp>
-      <p:sp>
-        <p:nvSpPr>
-          <p:cNvPr id="5" name="TextBox 4"/>
-          <p:cNvSpPr txBox="1"/>
-          <p:nvPr/>
-        </p:nvSpPr>
-        <p:spPr>
-          <a:xfrm>
-            <a:off x="502920" y="1097280"/>
-            <a:ext cx="11201400" cy="1143000"/>
-          </a:xfrm>
-          <a:prstGeom prst="rect">
-            <a:avLst/>
-          </a:prstGeom>
-          <a:noFill/>
-        </p:spPr>
-        <p:txBody>
-          <a:bodyPr wrap="square" lIns="0" rIns="0" tIns="0" bIns="0">
-            <a:spAutoFit/>
-          </a:bodyPr>
-          <a:lstStyle/>
-          <a:p>
-            <a:pPr algn="l">
-              <a:lnSpc>
-                <a:spcPct val="105000"/>
-              </a:lnSpc>
-              <a:spcAft>
-                <a:spcPts val="600"/>
-              </a:spcAft>
-            </a:pPr>
-            <a:r>
-              <a:rPr sz="3200" b="1">
-                <a:solidFill>
-                  <a:srgbClr val="000091"/>
-                </a:solidFill>
-                <a:latin typeface="Marianne"/>
-              </a:rPr>
-              <a:t>De l'usage individuel à l'adoption par les équipes</a:t>
-            </a:r>
-          </a:p>
-        </p:txBody>
-      </p:sp>
-      <p:sp>
-        <p:nvSpPr>
-          <p:cNvPr id="6" name="Rectangle 5"/>
-          <p:cNvSpPr/>
-          <p:nvPr/>
-        </p:nvSpPr>
-        <p:spPr>
-          <a:xfrm>
-            <a:off x="502920" y="2377440"/>
-            <a:ext cx="11201400" cy="914400"/>
+            <a:off x="548640" y="2084831"/>
+            <a:ext cx="3584448" cy="2743200"/>
           </a:xfrm>
           <a:prstGeom prst="rect">
             <a:avLst/>
@@ -3269,8 +3354,10 @@
           <a:solidFill>
             <a:srgbClr val="F5F5FE"/>
           </a:solidFill>
-          <a:ln>
-            <a:noFill/>
+          <a:ln w="9525">
+            <a:solidFill>
+              <a:srgbClr val="E3E3FD"/>
+            </a:solidFill>
           </a:ln>
           <a:effectLst/>
         </p:spPr>
@@ -3289,36 +3376,23 @@
           </a:fontRef>
         </p:style>
         <p:txBody>
-          <a:bodyPr rtlCol="0" anchor="ctr" wrap="square" lIns="228600" rIns="182880" tIns="109728" bIns="91440"/>
-          <a:lstStyle/>
-          <a:p>
-            <a:pPr algn="ctr">
-              <a:lnSpc>
-                <a:spcPct val="115000"/>
-              </a:lnSpc>
-            </a:pPr>
-            <a:r>
-              <a:rPr sz="1600">
-                <a:solidFill>
-                  <a:srgbClr val="2B2B2B"/>
-                </a:solidFill>
-                <a:latin typeface="Marianne"/>
-              </a:rPr>
-              <a:t>Le sujet n'est pas d'installer un outil, mais de faire de l'IA une vraie pratique d'équipe : on accompagne chaque rôle sur son métier, on lève les freins (outillage interne, souveraineté), et la demande devient entrante — les équipes viennent nous chercher.</a:t>
-            </a:r>
-          </a:p>
-        </p:txBody>
-      </p:sp>
-      <p:sp>
-        <p:nvSpPr>
-          <p:cNvPr id="7" name="Rectangle 6"/>
+          <a:bodyPr rtlCol="0" anchor="ctr"/>
+          <a:lstStyle/>
+          <a:p>
+            <a:pPr algn="ctr"/>
+          </a:p>
+        </p:txBody>
+      </p:sp>
+      <p:sp>
+        <p:nvSpPr>
+          <p:cNvPr id="8" name="Rectangle 7"/>
           <p:cNvSpPr/>
           <p:nvPr/>
         </p:nvSpPr>
         <p:spPr>
           <a:xfrm>
-            <a:off x="502920" y="2377440"/>
-            <a:ext cx="54864" cy="914400"/>
+            <a:off x="548640" y="2084831"/>
+            <a:ext cx="3584448" cy="50292"/>
           </a:xfrm>
           <a:prstGeom prst="rect">
             <a:avLst/>
@@ -3355,23 +3429,272 @@
       </p:sp>
       <p:sp>
         <p:nvSpPr>
-          <p:cNvPr id="8" name="Rectangle 7"/>
+          <p:cNvPr id="9" name="TextBox 8"/>
+          <p:cNvSpPr txBox="1"/>
+          <p:nvPr/>
+        </p:nvSpPr>
+        <p:spPr>
+          <a:xfrm>
+            <a:off x="676656" y="2194560"/>
+            <a:ext cx="3328415" cy="274320"/>
+          </a:xfrm>
+          <a:prstGeom prst="rect">
+            <a:avLst/>
+          </a:prstGeom>
+          <a:noFill/>
+        </p:spPr>
+        <p:txBody>
+          <a:bodyPr wrap="square">
+            <a:spAutoFit/>
+          </a:bodyPr>
+          <a:lstStyle/>
+          <a:p>
+            <a:pPr algn="l">
+              <a:lnSpc>
+                <a:spcPct val="115000"/>
+              </a:lnSpc>
+              <a:spcAft>
+                <a:spcPts val="400"/>
+              </a:spcAft>
+            </a:pPr>
+            <a:r>
+              <a:rPr sz="1100" b="1">
+                <a:solidFill>
+                  <a:srgbClr val="000091"/>
+                </a:solidFill>
+                <a:latin typeface="Marianne"/>
+              </a:rPr>
+              <a:t>LES ÉQUIPES ACCOMPAGNÉES</a:t>
+            </a:r>
+          </a:p>
+        </p:txBody>
+      </p:sp>
+      <p:sp>
+        <p:nvSpPr>
+          <p:cNvPr id="10" name="TextBox 9"/>
+          <p:cNvSpPr txBox="1"/>
+          <p:nvPr/>
+        </p:nvSpPr>
+        <p:spPr>
+          <a:xfrm>
+            <a:off x="676656" y="2450591"/>
+            <a:ext cx="3328415" cy="228600"/>
+          </a:xfrm>
+          <a:prstGeom prst="rect">
+            <a:avLst/>
+          </a:prstGeom>
+          <a:noFill/>
+        </p:spPr>
+        <p:txBody>
+          <a:bodyPr wrap="square">
+            <a:spAutoFit/>
+          </a:bodyPr>
+          <a:lstStyle/>
+          <a:p>
+            <a:pPr algn="l">
+              <a:lnSpc>
+                <a:spcPct val="115000"/>
+              </a:lnSpc>
+              <a:spcAft>
+                <a:spcPts val="400"/>
+              </a:spcAft>
+            </a:pPr>
+            <a:r>
+              <a:rPr sz="800" b="1">
+                <a:solidFill>
+                  <a:srgbClr val="666666"/>
+                </a:solidFill>
+                <a:latin typeface="Marianne"/>
+              </a:rPr>
+              <a:t>5 chantiers · 4 métiers · de la pratique au passage à l'échelle</a:t>
+            </a:r>
+          </a:p>
+        </p:txBody>
+      </p:sp>
+      <p:sp>
+        <p:nvSpPr>
+          <p:cNvPr id="11" name="TextBox 10"/>
+          <p:cNvSpPr txBox="1"/>
+          <p:nvPr/>
+        </p:nvSpPr>
+        <p:spPr>
+          <a:xfrm>
+            <a:off x="676656" y="2706624"/>
+            <a:ext cx="3328415" cy="2011680"/>
+          </a:xfrm>
+          <a:prstGeom prst="rect">
+            <a:avLst/>
+          </a:prstGeom>
+          <a:noFill/>
+        </p:spPr>
+        <p:txBody>
+          <a:bodyPr wrap="square">
+            <a:spAutoFit/>
+          </a:bodyPr>
+          <a:lstStyle/>
+          <a:p>
+            <a:pPr algn="l">
+              <a:lnSpc>
+                <a:spcPct val="115000"/>
+              </a:lnSpc>
+              <a:spcAft>
+                <a:spcPts val="500"/>
+              </a:spcAft>
+            </a:pPr>
+            <a:r>
+              <a:rPr sz="950" b="1">
+                <a:solidFill>
+                  <a:srgbClr val="1E1E1E"/>
+                </a:solidFill>
+                <a:latin typeface="Marianne"/>
+              </a:rPr>
+              <a:t>Egapro</a:t>
+            </a:r>
+            <a:r>
+              <a:rPr sz="950" b="0">
+                <a:solidFill>
+                  <a:srgbClr val="2B2B2B"/>
+                </a:solidFill>
+                <a:latin typeface="Marianne"/>
+              </a:rPr>
+              <a:t> — pilote, passé de 3 à 4 en maturité : orchestrations en routine.</a:t>
+            </a:r>
+          </a:p>
+          <a:p>
+            <a:pPr algn="l">
+              <a:lnSpc>
+                <a:spcPct val="115000"/>
+              </a:lnSpc>
+              <a:spcAft>
+                <a:spcPts val="500"/>
+              </a:spcAft>
+            </a:pPr>
+            <a:r>
+              <a:rPr sz="950" b="1">
+                <a:solidFill>
+                  <a:srgbClr val="1E1E1E"/>
+                </a:solidFill>
+                <a:latin typeface="Marianne"/>
+              </a:rPr>
+              <a:t>DACCORD</a:t>
+            </a:r>
+            <a:r>
+              <a:rPr sz="950" b="0">
+                <a:solidFill>
+                  <a:srgbClr val="2B2B2B"/>
+                </a:solidFill>
+                <a:latin typeface="Marianne"/>
+              </a:rPr>
+              <a:t> — équipe moteur, monte sa propre orchestration (1 → 2).</a:t>
+            </a:r>
+          </a:p>
+          <a:p>
+            <a:pPr algn="l">
+              <a:lnSpc>
+                <a:spcPct val="115000"/>
+              </a:lnSpc>
+              <a:spcAft>
+                <a:spcPts val="500"/>
+              </a:spcAft>
+            </a:pPr>
+            <a:r>
+              <a:rPr sz="950" b="1">
+                <a:solidFill>
+                  <a:srgbClr val="1E1E1E"/>
+                </a:solidFill>
+                <a:latin typeface="Marianne"/>
+              </a:rPr>
+              <a:t>SIRENA</a:t>
+            </a:r>
+            <a:r>
+              <a:rPr sz="950" b="0">
+                <a:solidFill>
+                  <a:srgbClr val="2B2B2B"/>
+                </a:solidFill>
+                <a:latin typeface="Marianne"/>
+              </a:rPr>
+              <a:t> — demande entrante : la cheffe de projet demande à être formée.</a:t>
+            </a:r>
+          </a:p>
+          <a:p>
+            <a:pPr algn="l">
+              <a:lnSpc>
+                <a:spcPct val="115000"/>
+              </a:lnSpc>
+              <a:spcAft>
+                <a:spcPts val="500"/>
+              </a:spcAft>
+            </a:pPr>
+            <a:r>
+              <a:rPr sz="950" b="1">
+                <a:solidFill>
+                  <a:srgbClr val="1E1E1E"/>
+                </a:solidFill>
+                <a:latin typeface="Marianne"/>
+              </a:rPr>
+              <a:t>VAO</a:t>
+            </a:r>
+            <a:r>
+              <a:rPr sz="950" b="0">
+                <a:solidFill>
+                  <a:srgbClr val="2B2B2B"/>
+                </a:solidFill>
+                <a:latin typeface="Marianne"/>
+              </a:rPr>
+              <a:t> — en découverte, atelier dev augmenté le 8 septembre.</a:t>
+            </a:r>
+          </a:p>
+          <a:p>
+            <a:pPr algn="l">
+              <a:lnSpc>
+                <a:spcPct val="115000"/>
+              </a:lnSpc>
+              <a:spcAft>
+                <a:spcPts val="500"/>
+              </a:spcAft>
+            </a:pPr>
+            <a:r>
+              <a:rPr sz="950" b="1">
+                <a:solidFill>
+                  <a:srgbClr val="1E1E1E"/>
+                </a:solidFill>
+                <a:latin typeface="Marianne"/>
+              </a:rPr>
+              <a:t>Transverse</a:t>
+            </a:r>
+            <a:r>
+              <a:rPr sz="950" b="0">
+                <a:solidFill>
+                  <a:srgbClr val="2B2B2B"/>
+                </a:solidFill>
+                <a:latin typeface="Marianne"/>
+              </a:rPr>
+              <a:t> — architectes (1 → 2), designers, référentiels (CEPS compris).</a:t>
+            </a:r>
+          </a:p>
+        </p:txBody>
+      </p:sp>
+      <p:sp>
+        <p:nvSpPr>
+          <p:cNvPr id="12" name="Rectangle 11"/>
           <p:cNvSpPr/>
           <p:nvPr/>
         </p:nvSpPr>
         <p:spPr>
           <a:xfrm>
-            <a:off x="502920" y="3566160"/>
-            <a:ext cx="3611880" cy="2103120"/>
+            <a:off x="4311396" y="2084831"/>
+            <a:ext cx="3584448" cy="2743200"/>
           </a:xfrm>
           <a:prstGeom prst="rect">
             <a:avLst/>
           </a:prstGeom>
           <a:solidFill>
-            <a:srgbClr val="FFFFFF"/>
+            <a:srgbClr val="F5F5FE"/>
           </a:solidFill>
-          <a:ln>
-            <a:noFill/>
+          <a:ln w="9525">
+            <a:solidFill>
+              <a:srgbClr val="E3E3FD"/>
+            </a:solidFill>
           </a:ln>
           <a:effectLst/>
         </p:spPr>
@@ -3399,14 +3722,14 @@
       </p:sp>
       <p:sp>
         <p:nvSpPr>
-          <p:cNvPr id="9" name="Rectangle 8"/>
+          <p:cNvPr id="13" name="Rectangle 12"/>
           <p:cNvSpPr/>
           <p:nvPr/>
         </p:nvSpPr>
         <p:spPr>
           <a:xfrm>
-            <a:off x="502920" y="3566160"/>
-            <a:ext cx="3611880" cy="64008"/>
+            <a:off x="4311396" y="2084831"/>
+            <a:ext cx="3584448" cy="50292"/>
           </a:xfrm>
           <a:prstGeom prst="rect">
             <a:avLst/>
@@ -3443,14 +3766,14 @@
       </p:sp>
       <p:sp>
         <p:nvSpPr>
-          <p:cNvPr id="10" name="TextBox 9"/>
+          <p:cNvPr id="14" name="TextBox 13"/>
           <p:cNvSpPr txBox="1"/>
           <p:nvPr/>
         </p:nvSpPr>
         <p:spPr>
           <a:xfrm>
-            <a:off x="685800" y="3730752"/>
-            <a:ext cx="3246120" cy="457200"/>
+            <a:off x="4439412" y="2194560"/>
+            <a:ext cx="3328415" cy="274320"/>
           </a:xfrm>
           <a:prstGeom prst="rect">
             <a:avLst/>
@@ -3458,38 +3781,41 @@
           <a:noFill/>
         </p:spPr>
         <p:txBody>
-          <a:bodyPr wrap="square" lIns="0" rIns="0" tIns="0" bIns="0">
+          <a:bodyPr wrap="square">
             <a:spAutoFit/>
           </a:bodyPr>
           <a:lstStyle/>
           <a:p>
             <a:pPr algn="l">
+              <a:lnSpc>
+                <a:spcPct val="115000"/>
+              </a:lnSpc>
               <a:spcAft>
-                <a:spcPts val="100"/>
+                <a:spcPts val="400"/>
               </a:spcAft>
             </a:pPr>
             <a:r>
-              <a:rPr sz="1500" b="1">
+              <a:rPr sz="1100" b="1">
                 <a:solidFill>
                   <a:srgbClr val="000091"/>
                 </a:solidFill>
                 <a:latin typeface="Marianne"/>
               </a:rPr>
-              <a:t>Les équipes accompagnées</a:t>
-            </a:r>
-          </a:p>
-        </p:txBody>
-      </p:sp>
-      <p:sp>
-        <p:nvSpPr>
-          <p:cNvPr id="11" name="TextBox 10"/>
+              <a:t>RÔLES AVEC LESQUELS ÇA AVANCE</a:t>
+            </a:r>
+          </a:p>
+        </p:txBody>
+      </p:sp>
+      <p:sp>
+        <p:nvSpPr>
+          <p:cNvPr id="15" name="TextBox 14"/>
           <p:cNvSpPr txBox="1"/>
           <p:nvPr/>
         </p:nvSpPr>
         <p:spPr>
           <a:xfrm>
-            <a:off x="685800" y="4096512"/>
-            <a:ext cx="3246120" cy="320040"/>
+            <a:off x="4439412" y="2450591"/>
+            <a:ext cx="3328415" cy="228600"/>
           </a:xfrm>
           <a:prstGeom prst="rect">
             <a:avLst/>
@@ -3497,38 +3823,41 @@
           <a:noFill/>
         </p:spPr>
         <p:txBody>
-          <a:bodyPr wrap="square" lIns="0" rIns="0" tIns="0" bIns="0">
+          <a:bodyPr wrap="square">
             <a:spAutoFit/>
           </a:bodyPr>
           <a:lstStyle/>
           <a:p>
             <a:pPr algn="l">
+              <a:lnSpc>
+                <a:spcPct val="115000"/>
+              </a:lnSpc>
               <a:spcAft>
-                <a:spcPts val="600"/>
+                <a:spcPts val="400"/>
               </a:spcAft>
             </a:pPr>
             <a:r>
-              <a:rPr sz="1100" b="1">
+              <a:rPr sz="800" b="1">
                 <a:solidFill>
                   <a:srgbClr val="666666"/>
                 </a:solidFill>
                 <a:latin typeface="Marianne"/>
               </a:rPr>
-              <a:t>6 équipes · 4 métiers</a:t>
-            </a:r>
-          </a:p>
-        </p:txBody>
-      </p:sp>
-      <p:sp>
-        <p:nvSpPr>
-          <p:cNvPr id="12" name="TextBox 11"/>
+              <a:t>Autant de leviers que de métiers</a:t>
+            </a:r>
+          </a:p>
+        </p:txBody>
+      </p:sp>
+      <p:sp>
+        <p:nvSpPr>
+          <p:cNvPr id="16" name="TextBox 15"/>
           <p:cNvSpPr txBox="1"/>
           <p:nvPr/>
         </p:nvSpPr>
         <p:spPr>
           <a:xfrm>
-            <a:off x="685800" y="4462272"/>
-            <a:ext cx="3246120" cy="1069848"/>
+            <a:off x="4439412" y="2706624"/>
+            <a:ext cx="3328415" cy="2011680"/>
           </a:xfrm>
           <a:prstGeom prst="rect">
             <a:avLst/>
@@ -3536,7 +3865,7 @@
           <a:noFill/>
         </p:spPr>
         <p:txBody>
-          <a:bodyPr wrap="square" lIns="0" rIns="0" tIns="0" bIns="0">
+          <a:bodyPr wrap="square">
             <a:spAutoFit/>
           </a:bodyPr>
           <a:lstStyle/>
@@ -3550,13 +3879,22 @@
               </a:spcAft>
             </a:pPr>
             <a:r>
-              <a:rPr sz="1300" b="0">
+              <a:rPr sz="950" b="1">
+                <a:solidFill>
+                  <a:srgbClr val="1E1E1E"/>
+                </a:solidFill>
+                <a:latin typeface="Marianne"/>
+              </a:rPr>
+              <a:t>Développeurs</a:t>
+            </a:r>
+            <a:r>
+              <a:rPr sz="950" b="0">
                 <a:solidFill>
                   <a:srgbClr val="2B2B2B"/>
                 </a:solidFill>
                 <a:latin typeface="Marianne"/>
               </a:rPr>
-              <a:t>Egapro — périmètre pilote, le plus avancé.</a:t>
+              <a:t> — orchestrations sécurisées : le code n'est plus testé par l'agent qui l'a écrit.</a:t>
             </a:r>
           </a:p>
           <a:p>
@@ -3569,13 +3907,22 @@
               </a:spcAft>
             </a:pPr>
             <a:r>
-              <a:rPr sz="1300" b="0">
+              <a:rPr sz="950" b="1">
+                <a:solidFill>
+                  <a:srgbClr val="1E1E1E"/>
+                </a:solidFill>
+                <a:latin typeface="Marianne"/>
+              </a:rPr>
+              <a:t>Chefs de projet / PM</a:t>
+            </a:r>
+            <a:r>
+              <a:rPr sz="950" b="0">
                 <a:solidFill>
                   <a:srgbClr val="2B2B2B"/>
                 </a:solidFill>
                 <a:latin typeface="Marianne"/>
               </a:rPr>
-              <a:t>DACCORD — équipe moteur, passée à l'acte en autonomie.</a:t>
+              <a:t> — Egapro pilote à la vitesse de l'IA · DACCORD &amp; SIRENA passent aux tickets générés.</a:t>
             </a:r>
           </a:p>
           <a:p>
@@ -3588,13 +3935,22 @@
               </a:spcAft>
             </a:pPr>
             <a:r>
-              <a:rPr sz="1300" b="0">
+              <a:rPr sz="950" b="1">
+                <a:solidFill>
+                  <a:srgbClr val="1E1E1E"/>
+                </a:solidFill>
+                <a:latin typeface="Marianne"/>
+              </a:rPr>
+              <a:t>Designers</a:t>
+            </a:r>
+            <a:r>
+              <a:rPr sz="950" b="0">
                 <a:solidFill>
                   <a:srgbClr val="2B2B2B"/>
                 </a:solidFill>
                 <a:latin typeface="Marianne"/>
               </a:rPr>
-              <a:t>SIRENA — demande entrante : la cheffe de projet exige d'être formée.</a:t>
+              <a:t> — prototypes DSFR testables, maquette Figma générée : Louis valide (13/08).</a:t>
             </a:r>
           </a:p>
           <a:p>
@@ -3607,13 +3963,22 @@
               </a:spcAft>
             </a:pPr>
             <a:r>
-              <a:rPr sz="1300" b="0">
+              <a:rPr sz="950" b="1">
+                <a:solidFill>
+                  <a:srgbClr val="1E1E1E"/>
+                </a:solidFill>
+                <a:latin typeface="Marianne"/>
+              </a:rPr>
+              <a:t>Architectes</a:t>
+            </a:r>
+            <a:r>
+              <a:rPr sz="950" b="0">
                 <a:solidFill>
                   <a:srgbClr val="2B2B2B"/>
                 </a:solidFill>
                 <a:latin typeface="Marianne"/>
               </a:rPr>
-              <a:t>VAO — en découverte, atelier préparé.</a:t>
+              <a:t> — cinq use cases identifiés, priorisés par eux-mêmes.</a:t>
             </a:r>
           </a:p>
           <a:p>
@@ -3626,36 +3991,47 @@
               </a:spcAft>
             </a:pPr>
             <a:r>
-              <a:rPr sz="1300" b="0">
+              <a:rPr sz="950" b="1">
+                <a:solidFill>
+                  <a:srgbClr val="1E1E1E"/>
+                </a:solidFill>
+                <a:latin typeface="Marianne"/>
+              </a:rPr>
+              <a:t>PO &amp; RU</a:t>
+            </a:r>
+            <a:r>
+              <a:rPr sz="950" b="0">
                 <a:solidFill>
                   <a:srgbClr val="2B2B2B"/>
                 </a:solidFill>
                 <a:latin typeface="Marianne"/>
               </a:rPr>
-              <a:t>Transverse — architectes, designers, référentiels, CEPS.</a:t>
-            </a:r>
-          </a:p>
-        </p:txBody>
-      </p:sp>
-      <p:sp>
-        <p:nvSpPr>
-          <p:cNvPr id="13" name="Rectangle 12"/>
+              <a:t> — use cases en formalisation (Olivier, Felix).</a:t>
+            </a:r>
+          </a:p>
+        </p:txBody>
+      </p:sp>
+      <p:sp>
+        <p:nvSpPr>
+          <p:cNvPr id="17" name="Rectangle 16"/>
           <p:cNvSpPr/>
           <p:nvPr/>
         </p:nvSpPr>
         <p:spPr>
           <a:xfrm>
-            <a:off x="4297680" y="3566160"/>
-            <a:ext cx="3611880" cy="2103120"/>
+            <a:off x="8074152" y="2084831"/>
+            <a:ext cx="3584448" cy="2743200"/>
           </a:xfrm>
           <a:prstGeom prst="rect">
             <a:avLst/>
           </a:prstGeom>
           <a:solidFill>
-            <a:srgbClr val="FFFFFF"/>
+            <a:srgbClr val="F5F5FE"/>
           </a:solidFill>
-          <a:ln>
-            <a:noFill/>
+          <a:ln w="9525">
+            <a:solidFill>
+              <a:srgbClr val="E3E3FD"/>
+            </a:solidFill>
           </a:ln>
           <a:effectLst/>
         </p:spPr>
@@ -3683,14 +4059,14 @@
       </p:sp>
       <p:sp>
         <p:nvSpPr>
-          <p:cNvPr id="14" name="Rectangle 13"/>
+          <p:cNvPr id="18" name="Rectangle 17"/>
           <p:cNvSpPr/>
           <p:nvPr/>
         </p:nvSpPr>
         <p:spPr>
           <a:xfrm>
-            <a:off x="4297680" y="3566160"/>
-            <a:ext cx="3611880" cy="64008"/>
+            <a:off x="8074152" y="2084831"/>
+            <a:ext cx="3584448" cy="50292"/>
           </a:xfrm>
           <a:prstGeom prst="rect">
             <a:avLst/>
@@ -3727,14 +4103,14 @@
       </p:sp>
       <p:sp>
         <p:nvSpPr>
-          <p:cNvPr id="15" name="TextBox 14"/>
+          <p:cNvPr id="19" name="TextBox 18"/>
           <p:cNvSpPr txBox="1"/>
           <p:nvPr/>
         </p:nvSpPr>
         <p:spPr>
           <a:xfrm>
-            <a:off x="4480560" y="3730752"/>
-            <a:ext cx="3246120" cy="457200"/>
+            <a:off x="8202168" y="2194560"/>
+            <a:ext cx="3328415" cy="274320"/>
           </a:xfrm>
           <a:prstGeom prst="rect">
             <a:avLst/>
@@ -3742,38 +4118,41 @@
           <a:noFill/>
         </p:spPr>
         <p:txBody>
-          <a:bodyPr wrap="square" lIns="0" rIns="0" tIns="0" bIns="0">
+          <a:bodyPr wrap="square">
             <a:spAutoFit/>
           </a:bodyPr>
           <a:lstStyle/>
           <a:p>
             <a:pPr algn="l">
+              <a:lnSpc>
+                <a:spcPct val="115000"/>
+              </a:lnSpc>
               <a:spcAft>
-                <a:spcPts val="100"/>
+                <a:spcPts val="400"/>
               </a:spcAft>
             </a:pPr>
             <a:r>
-              <a:rPr sz="1500" b="1">
+              <a:rPr sz="1100" b="1">
                 <a:solidFill>
                   <a:srgbClr val="000091"/>
                 </a:solidFill>
                 <a:latin typeface="Marianne"/>
               </a:rPr>
-              <a:t>Rôles avec lesquels ça avance</a:t>
-            </a:r>
-          </a:p>
-        </p:txBody>
-      </p:sp>
-      <p:sp>
-        <p:nvSpPr>
-          <p:cNvPr id="16" name="TextBox 15"/>
+              <a:t>CE QUI CONDITIONNE L'ÉCHELLE</a:t>
+            </a:r>
+          </a:p>
+        </p:txBody>
+      </p:sp>
+      <p:sp>
+        <p:nvSpPr>
+          <p:cNvPr id="20" name="TextBox 19"/>
           <p:cNvSpPr txBox="1"/>
           <p:nvPr/>
         </p:nvSpPr>
         <p:spPr>
           <a:xfrm>
-            <a:off x="4480560" y="4096512"/>
-            <a:ext cx="3246120" cy="320040"/>
+            <a:off x="8202168" y="2450591"/>
+            <a:ext cx="3328415" cy="228600"/>
           </a:xfrm>
           <a:prstGeom prst="rect">
             <a:avLst/>
@@ -3781,38 +4160,41 @@
           <a:noFill/>
         </p:spPr>
         <p:txBody>
-          <a:bodyPr wrap="square" lIns="0" rIns="0" tIns="0" bIns="0">
+          <a:bodyPr wrap="square">
             <a:spAutoFit/>
           </a:bodyPr>
           <a:lstStyle/>
           <a:p>
             <a:pPr algn="l">
+              <a:lnSpc>
+                <a:spcPct val="115000"/>
+              </a:lnSpc>
               <a:spcAft>
-                <a:spcPts val="600"/>
+                <a:spcPts val="400"/>
               </a:spcAft>
             </a:pPr>
             <a:r>
-              <a:rPr sz="1100" b="1">
+              <a:rPr sz="800" b="1">
                 <a:solidFill>
                   <a:srgbClr val="666666"/>
                 </a:solidFill>
                 <a:latin typeface="Marianne"/>
               </a:rPr>
-              <a:t>Autant de leviers que de métiers</a:t>
-            </a:r>
-          </a:p>
-        </p:txBody>
-      </p:sp>
-      <p:sp>
-        <p:nvSpPr>
-          <p:cNvPr id="17" name="TextBox 16"/>
+              <a:t>Poste de travail · fournisseurs · bench</a:t>
+            </a:r>
+          </a:p>
+        </p:txBody>
+      </p:sp>
+      <p:sp>
+        <p:nvSpPr>
+          <p:cNvPr id="21" name="TextBox 20"/>
           <p:cNvSpPr txBox="1"/>
           <p:nvPr/>
         </p:nvSpPr>
         <p:spPr>
           <a:xfrm>
-            <a:off x="4480560" y="4462272"/>
-            <a:ext cx="3246120" cy="1069848"/>
+            <a:off x="8202168" y="2706624"/>
+            <a:ext cx="3328415" cy="2011680"/>
           </a:xfrm>
           <a:prstGeom prst="rect">
             <a:avLst/>
@@ -3820,7 +4202,7 @@
           <a:noFill/>
         </p:spPr>
         <p:txBody>
-          <a:bodyPr wrap="square" lIns="0" rIns="0" tIns="0" bIns="0">
+          <a:bodyPr wrap="square">
             <a:spAutoFit/>
           </a:bodyPr>
           <a:lstStyle/>
@@ -3834,13 +4216,22 @@
               </a:spcAft>
             </a:pPr>
             <a:r>
-              <a:rPr sz="1300" b="0">
+              <a:rPr sz="950" b="1">
+                <a:solidFill>
+                  <a:srgbClr val="1E1E1E"/>
+                </a:solidFill>
+                <a:latin typeface="Marianne"/>
+              </a:rPr>
+              <a:t>Poste de travail</a:t>
+            </a:r>
+            <a:r>
+              <a:rPr sz="950" b="0">
                 <a:solidFill>
                   <a:srgbClr val="2B2B2B"/>
                 </a:solidFill>
                 <a:latin typeface="Marianne"/>
               </a:rPr>
-              <a:t>Développeurs — orchestration de subagents, system prompts, code &amp; tests.</a:t>
+              <a:t> — deux voies opérationnelles sur PC ministère : OpenCode Desktop, Claude Code dans VS Code ; la matrice « qui peut utiliser quoi » est livrée.</a:t>
             </a:r>
           </a:p>
           <a:p>
@@ -3853,13 +4244,22 @@
               </a:spcAft>
             </a:pPr>
             <a:r>
-              <a:rPr sz="1300" b="0">
+              <a:rPr sz="950" b="1">
+                <a:solidFill>
+                  <a:srgbClr val="1E1E1E"/>
+                </a:solidFill>
+                <a:latin typeface="Marianne"/>
+              </a:rPr>
+              <a:t>Fournisseurs</a:t>
+            </a:r>
+            <a:r>
+              <a:rPr sz="950" b="0">
                 <a:solidFill>
                   <a:srgbClr val="2B2B2B"/>
                 </a:solidFill>
                 <a:latin typeface="Marianne"/>
               </a:rPr>
-              <a:t>Chefs de projet / PM — SIRENA (Aurélie) · DACCORD (Kahina).</a:t>
+              <a:t> — Bedrock viable (Claude Code + observabilité) mais harness imposé : Scaleway et Vertex AI à explorer.</a:t>
             </a:r>
           </a:p>
           <a:p>
@@ -3872,311 +4272,36 @@
               </a:spcAft>
             </a:pPr>
             <a:r>
-              <a:rPr sz="1300" b="0">
+              <a:rPr sz="950" b="1">
+                <a:solidFill>
+                  <a:srgbClr val="1E1E1E"/>
+                </a:solidFill>
+                <a:latin typeface="Marianne"/>
+              </a:rPr>
+              <a:t>Bench</a:t>
+            </a:r>
+            <a:r>
+              <a:rPr sz="950" b="0">
                 <a:solidFill>
                   <a:srgbClr val="2B2B2B"/>
                 </a:solidFill>
                 <a:latin typeface="Marianne"/>
               </a:rPr>
-              <a:t>Designers — prototypes, skills UX, cible DSFR.</a:t>
-            </a:r>
-          </a:p>
-          <a:p>
-            <a:pPr algn="l">
-              <a:lnSpc>
-                <a:spcPct val="115000"/>
-              </a:lnSpc>
-              <a:spcAft>
-                <a:spcPts val="500"/>
-              </a:spcAft>
-            </a:pPr>
-            <a:r>
-              <a:rPr sz="1300" b="0">
-                <a:solidFill>
-                  <a:srgbClr val="2B2B2B"/>
-                </a:solidFill>
-                <a:latin typeface="Marianne"/>
-              </a:rPr>
-              <a:t>Architectes — DA générés, référentiels outillés.</a:t>
-            </a:r>
-          </a:p>
-          <a:p>
-            <a:pPr algn="l">
-              <a:lnSpc>
-                <a:spcPct val="115000"/>
-              </a:lnSpc>
-              <a:spcAft>
-                <a:spcPts val="500"/>
-              </a:spcAft>
-            </a:pPr>
-            <a:r>
-              <a:rPr sz="1300" b="0">
-                <a:solidFill>
-                  <a:srgbClr val="2B2B2B"/>
-                </a:solidFill>
-                <a:latin typeface="Marianne"/>
-              </a:rPr>
-              <a:t>PO &amp; Recherche utilisateurs — en synchronisation (Olivier, Felix).</a:t>
-            </a:r>
-          </a:p>
-        </p:txBody>
-      </p:sp>
-      <p:sp>
-        <p:nvSpPr>
-          <p:cNvPr id="18" name="Rectangle 17"/>
+              <a:t> — 7 stacks comparées (perf / prix / souveraineté / conformité), élargi aux modèles Bedrock en août.</a:t>
+            </a:r>
+          </a:p>
+        </p:txBody>
+      </p:sp>
+      <p:sp>
+        <p:nvSpPr>
+          <p:cNvPr id="22" name="Rectangle 21"/>
           <p:cNvSpPr/>
           <p:nvPr/>
         </p:nvSpPr>
         <p:spPr>
           <a:xfrm>
-            <a:off x="8092440" y="3566160"/>
-            <a:ext cx="3611880" cy="2103120"/>
-          </a:xfrm>
-          <a:prstGeom prst="rect">
-            <a:avLst/>
-          </a:prstGeom>
-          <a:solidFill>
-            <a:srgbClr val="FFFFFF"/>
-          </a:solidFill>
-          <a:ln>
-            <a:noFill/>
-          </a:ln>
-          <a:effectLst/>
-        </p:spPr>
-        <p:style>
-          <a:lnRef idx="1">
-            <a:schemeClr val="accent1"/>
-          </a:lnRef>
-          <a:fillRef idx="3">
-            <a:schemeClr val="accent1"/>
-          </a:fillRef>
-          <a:effectRef idx="2">
-            <a:schemeClr val="accent1"/>
-          </a:effectRef>
-          <a:fontRef idx="minor">
-            <a:schemeClr val="lt1"/>
-          </a:fontRef>
-        </p:style>
-        <p:txBody>
-          <a:bodyPr rtlCol="0" anchor="ctr"/>
-          <a:lstStyle/>
-          <a:p>
-            <a:pPr algn="ctr"/>
-          </a:p>
-        </p:txBody>
-      </p:sp>
-      <p:sp>
-        <p:nvSpPr>
-          <p:cNvPr id="19" name="Rectangle 18"/>
-          <p:cNvSpPr/>
-          <p:nvPr/>
-        </p:nvSpPr>
-        <p:spPr>
-          <a:xfrm>
-            <a:off x="8092440" y="3566160"/>
-            <a:ext cx="3611880" cy="64008"/>
-          </a:xfrm>
-          <a:prstGeom prst="rect">
-            <a:avLst/>
-          </a:prstGeom>
-          <a:solidFill>
-            <a:srgbClr val="000091"/>
-          </a:solidFill>
-          <a:ln>
-            <a:noFill/>
-          </a:ln>
-          <a:effectLst/>
-        </p:spPr>
-        <p:style>
-          <a:lnRef idx="1">
-            <a:schemeClr val="accent1"/>
-          </a:lnRef>
-          <a:fillRef idx="3">
-            <a:schemeClr val="accent1"/>
-          </a:fillRef>
-          <a:effectRef idx="2">
-            <a:schemeClr val="accent1"/>
-          </a:effectRef>
-          <a:fontRef idx="minor">
-            <a:schemeClr val="lt1"/>
-          </a:fontRef>
-        </p:style>
-        <p:txBody>
-          <a:bodyPr rtlCol="0" anchor="ctr"/>
-          <a:lstStyle/>
-          <a:p>
-            <a:pPr algn="ctr"/>
-          </a:p>
-        </p:txBody>
-      </p:sp>
-      <p:sp>
-        <p:nvSpPr>
-          <p:cNvPr id="20" name="TextBox 19"/>
-          <p:cNvSpPr txBox="1"/>
-          <p:nvPr/>
-        </p:nvSpPr>
-        <p:spPr>
-          <a:xfrm>
-            <a:off x="8275319" y="3730752"/>
-            <a:ext cx="3246120" cy="457200"/>
-          </a:xfrm>
-          <a:prstGeom prst="rect">
-            <a:avLst/>
-          </a:prstGeom>
-          <a:noFill/>
-        </p:spPr>
-        <p:txBody>
-          <a:bodyPr wrap="square" lIns="0" rIns="0" tIns="0" bIns="0">
-            <a:spAutoFit/>
-          </a:bodyPr>
-          <a:lstStyle/>
-          <a:p>
-            <a:pPr algn="l">
-              <a:spcAft>
-                <a:spcPts val="100"/>
-              </a:spcAft>
-            </a:pPr>
-            <a:r>
-              <a:rPr sz="1500" b="1">
-                <a:solidFill>
-                  <a:srgbClr val="000091"/>
-                </a:solidFill>
-                <a:latin typeface="Marianne"/>
-              </a:rPr>
-              <a:t>Ce qui conditionne l'échelle</a:t>
-            </a:r>
-          </a:p>
-        </p:txBody>
-      </p:sp>
-      <p:sp>
-        <p:nvSpPr>
-          <p:cNvPr id="21" name="TextBox 20"/>
-          <p:cNvSpPr txBox="1"/>
-          <p:nvPr/>
-        </p:nvSpPr>
-        <p:spPr>
-          <a:xfrm>
-            <a:off x="8275319" y="4096512"/>
-            <a:ext cx="3246120" cy="320040"/>
-          </a:xfrm>
-          <a:prstGeom prst="rect">
-            <a:avLst/>
-          </a:prstGeom>
-          <a:noFill/>
-        </p:spPr>
-        <p:txBody>
-          <a:bodyPr wrap="square" lIns="0" rIns="0" tIns="0" bIns="0">
-            <a:spAutoFit/>
-          </a:bodyPr>
-          <a:lstStyle/>
-          <a:p>
-            <a:pPr algn="l">
-              <a:spcAft>
-                <a:spcPts val="600"/>
-              </a:spcAft>
-            </a:pPr>
-            <a:r>
-              <a:rPr sz="1100" b="1">
-                <a:solidFill>
-                  <a:srgbClr val="666666"/>
-                </a:solidFill>
-                <a:latin typeface="Marianne"/>
-              </a:rPr>
-              <a:t>Outillage interne + souveraineté</a:t>
-            </a:r>
-          </a:p>
-        </p:txBody>
-      </p:sp>
-      <p:sp>
-        <p:nvSpPr>
-          <p:cNvPr id="22" name="TextBox 21"/>
-          <p:cNvSpPr txBox="1"/>
-          <p:nvPr/>
-        </p:nvSpPr>
-        <p:spPr>
-          <a:xfrm>
-            <a:off x="8275319" y="4462272"/>
-            <a:ext cx="3246120" cy="1069848"/>
-          </a:xfrm>
-          <a:prstGeom prst="rect">
-            <a:avLst/>
-          </a:prstGeom>
-          <a:noFill/>
-        </p:spPr>
-        <p:txBody>
-          <a:bodyPr wrap="square" lIns="0" rIns="0" tIns="0" bIns="0">
-            <a:spAutoFit/>
-          </a:bodyPr>
-          <a:lstStyle/>
-          <a:p>
-            <a:pPr algn="l">
-              <a:lnSpc>
-                <a:spcPct val="115000"/>
-              </a:lnSpc>
-              <a:spcAft>
-                <a:spcPts val="500"/>
-              </a:spcAft>
-            </a:pPr>
-            <a:r>
-              <a:rPr sz="1300" b="0">
-                <a:solidFill>
-                  <a:srgbClr val="2B2B2B"/>
-                </a:solidFill>
-                <a:latin typeface="Marianne"/>
-              </a:rPr>
-              <a:t>Outillage des postes internes — packaging par le centre logiciel ou compte admin temporaire.</a:t>
-            </a:r>
-          </a:p>
-          <a:p>
-            <a:pPr algn="l">
-              <a:lnSpc>
-                <a:spcPct val="115000"/>
-              </a:lnSpc>
-              <a:spcAft>
-                <a:spcPts val="500"/>
-              </a:spcAft>
-            </a:pPr>
-            <a:r>
-              <a:rPr sz="1300" b="0">
-                <a:solidFill>
-                  <a:srgbClr val="2B2B2B"/>
-                </a:solidFill>
-                <a:latin typeface="Marianne"/>
-              </a:rPr>
-              <a:t>Bedrock avec AWS — large catalogue, dont open-weight, avec observabilité et coûts maîtrisés.</a:t>
-            </a:r>
-          </a:p>
-          <a:p>
-            <a:pPr algn="l">
-              <a:lnSpc>
-                <a:spcPct val="115000"/>
-              </a:lnSpc>
-              <a:spcAft>
-                <a:spcPts val="500"/>
-              </a:spcAft>
-            </a:pPr>
-            <a:r>
-              <a:rPr sz="1300" b="0">
-                <a:solidFill>
-                  <a:srgbClr val="2B2B2B"/>
-                </a:solidFill>
-                <a:latin typeface="Marianne"/>
-              </a:rPr>
-              <a:t>Bench souveraineté &amp; conformité — pour choisir la direction (prix / perf / souveraineté / conformité).</a:t>
-            </a:r>
-          </a:p>
-        </p:txBody>
-      </p:sp>
-      <p:sp>
-        <p:nvSpPr>
-          <p:cNvPr id="23" name="Rectangle 22"/>
-          <p:cNvSpPr/>
-          <p:nvPr/>
-        </p:nvSpPr>
-        <p:spPr>
-          <a:xfrm>
-            <a:off x="502920" y="5897880"/>
-            <a:ext cx="11201400" cy="731520"/>
+            <a:off x="548640" y="4956048"/>
+            <a:ext cx="11109960" cy="1298448"/>
           </a:xfrm>
           <a:prstGeom prst="rect">
             <a:avLst/>
@@ -4204,36 +4329,23 @@
           </a:fontRef>
         </p:style>
         <p:txBody>
-          <a:bodyPr rtlCol="0" anchor="ctr" wrap="square" lIns="228600" rIns="182880" tIns="109728" bIns="91440"/>
-          <a:lstStyle/>
-          <a:p>
-            <a:pPr algn="ctr">
-              <a:lnSpc>
-                <a:spcPct val="115000"/>
-              </a:lnSpc>
-            </a:pPr>
-            <a:r>
-              <a:rPr sz="1300">
-                <a:solidFill>
-                  <a:srgbClr val="2B2B2B"/>
-                </a:solidFill>
-                <a:latin typeface="Marianne"/>
-              </a:rPr>
-              <a:t>Le déclic, métier par métier — DACCORD : devs (orchestration subagents) + PM, en autonomie. SIRENA : PM formée mi-août. Architectes : 5 use cases émergés en atelier. PO/RU : map des use cases avec Olivier et Felix. Accompagnement réel + freins levés = une dynamique d'équipe.</a:t>
-            </a:r>
-          </a:p>
-        </p:txBody>
-      </p:sp>
-      <p:sp>
-        <p:nvSpPr>
-          <p:cNvPr id="24" name="Rectangle 23"/>
+          <a:bodyPr rtlCol="0" anchor="ctr"/>
+          <a:lstStyle/>
+          <a:p>
+            <a:pPr algn="ctr"/>
+          </a:p>
+        </p:txBody>
+      </p:sp>
+      <p:sp>
+        <p:nvSpPr>
+          <p:cNvPr id="23" name="Rectangle 22"/>
           <p:cNvSpPr/>
           <p:nvPr/>
         </p:nvSpPr>
         <p:spPr>
           <a:xfrm>
-            <a:off x="502920" y="5897880"/>
-            <a:ext cx="54864" cy="731520"/>
+            <a:off x="548640" y="4956048"/>
+            <a:ext cx="64008" cy="1298448"/>
           </a:xfrm>
           <a:prstGeom prst="rect">
             <a:avLst/>
@@ -4265,6 +4377,398 @@
           <a:lstStyle/>
           <a:p>
             <a:pPr algn="ctr"/>
+          </a:p>
+        </p:txBody>
+      </p:sp>
+      <p:sp>
+        <p:nvSpPr>
+          <p:cNvPr id="24" name="TextBox 23"/>
+          <p:cNvSpPr txBox="1"/>
+          <p:nvPr/>
+        </p:nvSpPr>
+        <p:spPr>
+          <a:xfrm>
+            <a:off x="749808" y="5047488"/>
+            <a:ext cx="10744200" cy="256032"/>
+          </a:xfrm>
+          <a:prstGeom prst="rect">
+            <a:avLst/>
+          </a:prstGeom>
+          <a:noFill/>
+        </p:spPr>
+        <p:txBody>
+          <a:bodyPr wrap="square">
+            <a:spAutoFit/>
+          </a:bodyPr>
+          <a:lstStyle/>
+          <a:p>
+            <a:pPr algn="l">
+              <a:lnSpc>
+                <a:spcPct val="115000"/>
+              </a:lnSpc>
+              <a:spcAft>
+                <a:spcPts val="400"/>
+              </a:spcAft>
+            </a:pPr>
+            <a:r>
+              <a:rPr sz="1050" b="1">
+                <a:solidFill>
+                  <a:srgbClr val="18753C"/>
+                </a:solidFill>
+                <a:latin typeface="Marianne"/>
+              </a:rPr>
+              <a:t>LE DÉCLIC, MÉTIER PAR MÉTIER</a:t>
+            </a:r>
+          </a:p>
+        </p:txBody>
+      </p:sp>
+      <p:sp>
+        <p:nvSpPr>
+          <p:cNvPr id="25" name="TextBox 24"/>
+          <p:cNvSpPr txBox="1"/>
+          <p:nvPr/>
+        </p:nvSpPr>
+        <p:spPr>
+          <a:xfrm>
+            <a:off x="749808" y="5321807"/>
+            <a:ext cx="10707624" cy="859536"/>
+          </a:xfrm>
+          <a:prstGeom prst="rect">
+            <a:avLst/>
+          </a:prstGeom>
+          <a:noFill/>
+        </p:spPr>
+        <p:txBody>
+          <a:bodyPr wrap="square">
+            <a:spAutoFit/>
+          </a:bodyPr>
+          <a:lstStyle/>
+          <a:p>
+            <a:pPr algn="l">
+              <a:lnSpc>
+                <a:spcPct val="115000"/>
+              </a:lnSpc>
+              <a:spcAft>
+                <a:spcPts val="400"/>
+              </a:spcAft>
+            </a:pPr>
+            <a:r>
+              <a:rPr sz="950" b="1">
+                <a:solidFill>
+                  <a:srgbClr val="000091"/>
+                </a:solidFill>
+                <a:latin typeface="Marianne"/>
+              </a:rPr>
+              <a:t>DACCORD</a:t>
+            </a:r>
+            <a:r>
+              <a:rPr sz="950" b="0">
+                <a:solidFill>
+                  <a:srgbClr val="1E1E1E"/>
+                </a:solidFill>
+                <a:latin typeface="Marianne"/>
+              </a:rPr>
+              <a:t> : dès le lundi suivant le coaching, l'équipe met en commun ses </a:t>
+            </a:r>
+            <a:r>
+              <a:rPr sz="950" b="1">
+                <a:solidFill>
+                  <a:srgbClr val="000091"/>
+                </a:solidFill>
+                <a:latin typeface="Marianne"/>
+              </a:rPr>
+              <a:t>system prompts</a:t>
+            </a:r>
+            <a:r>
+              <a:rPr sz="950" b="0">
+                <a:solidFill>
+                  <a:srgbClr val="1E1E1E"/>
+                </a:solidFill>
+                <a:latin typeface="Marianne"/>
+              </a:rPr>
+              <a:t> de sa propre initiative ; l'orchestration se monte en accompagnement individuel. </a:t>
+            </a:r>
+            <a:r>
+              <a:rPr sz="950" b="1">
+                <a:solidFill>
+                  <a:srgbClr val="000091"/>
+                </a:solidFill>
+                <a:latin typeface="Marianne"/>
+              </a:rPr>
+              <a:t>Chefs de projet</a:t>
+            </a:r>
+            <a:r>
+              <a:rPr sz="950" b="0">
+                <a:solidFill>
+                  <a:srgbClr val="1E1E1E"/>
+                </a:solidFill>
+                <a:latin typeface="Marianne"/>
+              </a:rPr>
+              <a:t> : formation à la </a:t>
+            </a:r>
+            <a:r>
+              <a:rPr sz="950" b="1">
+                <a:solidFill>
+                  <a:srgbClr val="000091"/>
+                </a:solidFill>
+                <a:latin typeface="Marianne"/>
+              </a:rPr>
+              <a:t>génération de tickets Jira</a:t>
+            </a:r>
+            <a:r>
+              <a:rPr sz="950" b="0">
+                <a:solidFill>
+                  <a:srgbClr val="1E1E1E"/>
+                </a:solidFill>
+                <a:latin typeface="Marianne"/>
+              </a:rPr>
+              <a:t> actée — DACCORD le 25 août avec Richard et Noura, SIRENA à caler (Aurélie est demandeuse). </a:t>
+            </a:r>
+            <a:r>
+              <a:rPr sz="950" b="1">
+                <a:solidFill>
+                  <a:srgbClr val="000091"/>
+                </a:solidFill>
+                <a:latin typeface="Marianne"/>
+              </a:rPr>
+              <a:t>Architectes</a:t>
+            </a:r>
+            <a:r>
+              <a:rPr sz="950" b="0">
+                <a:solidFill>
+                  <a:srgbClr val="1E1E1E"/>
+                </a:solidFill>
+                <a:latin typeface="Marianne"/>
+              </a:rPr>
+              <a:t> : de zéro intérêt à </a:t>
+            </a:r>
+            <a:r>
+              <a:rPr sz="950" b="1">
+                <a:solidFill>
+                  <a:srgbClr val="000091"/>
+                </a:solidFill>
+                <a:latin typeface="Marianne"/>
+              </a:rPr>
+              <a:t>cinq use cases</a:t>
+            </a:r>
+            <a:r>
+              <a:rPr sz="950" b="0">
+                <a:solidFill>
+                  <a:srgbClr val="1E1E1E"/>
+                </a:solidFill>
+                <a:latin typeface="Marianne"/>
+              </a:rPr>
+              <a:t> qu'ils priorisent eux-mêmes. </a:t>
+            </a:r>
+            <a:r>
+              <a:rPr sz="950" b="1">
+                <a:solidFill>
+                  <a:srgbClr val="000091"/>
+                </a:solidFill>
+                <a:latin typeface="Marianne"/>
+              </a:rPr>
+              <a:t>Designers</a:t>
+            </a:r>
+            <a:r>
+              <a:rPr sz="950" b="0">
+                <a:solidFill>
+                  <a:srgbClr val="1E1E1E"/>
+                </a:solidFill>
+                <a:latin typeface="Marianne"/>
+              </a:rPr>
+              <a:t> : de « l'IA a peu de valeur pour nous » à des </a:t>
+            </a:r>
+            <a:r>
+              <a:rPr sz="950" b="1">
+                <a:solidFill>
+                  <a:srgbClr val="000091"/>
+                </a:solidFill>
+                <a:latin typeface="Marianne"/>
+              </a:rPr>
+              <a:t>prototypes DSFR</a:t>
+            </a:r>
+            <a:r>
+              <a:rPr sz="950" b="0">
+                <a:solidFill>
+                  <a:srgbClr val="1E1E1E"/>
+                </a:solidFill>
+                <a:latin typeface="Marianne"/>
+              </a:rPr>
+              <a:t> testables et des </a:t>
+            </a:r>
+            <a:r>
+              <a:rPr sz="950" b="1">
+                <a:solidFill>
+                  <a:srgbClr val="000091"/>
+                </a:solidFill>
+                <a:latin typeface="Marianne"/>
+              </a:rPr>
+              <a:t>maquettes Figma générées</a:t>
+            </a:r>
+            <a:r>
+              <a:rPr sz="950" b="0">
+                <a:solidFill>
+                  <a:srgbClr val="1E1E1E"/>
+                </a:solidFill>
+                <a:latin typeface="Marianne"/>
+              </a:rPr>
+              <a:t> — Louis valide (13/08). </a:t>
+            </a:r>
+            <a:r>
+              <a:rPr sz="950" b="1">
+                <a:solidFill>
+                  <a:srgbClr val="000091"/>
+                </a:solidFill>
+                <a:latin typeface="Marianne"/>
+              </a:rPr>
+              <a:t>PO &amp; RU</a:t>
+            </a:r>
+            <a:r>
+              <a:rPr sz="950" b="0">
+                <a:solidFill>
+                  <a:srgbClr val="1E1E1E"/>
+                </a:solidFill>
+                <a:latin typeface="Marianne"/>
+              </a:rPr>
+              <a:t> : Felix formalise les use cases.</a:t>
+            </a:r>
+          </a:p>
+        </p:txBody>
+      </p:sp>
+      <p:sp>
+        <p:nvSpPr>
+          <p:cNvPr id="26" name="Rectangle 25"/>
+          <p:cNvSpPr/>
+          <p:nvPr/>
+        </p:nvSpPr>
+        <p:spPr>
+          <a:xfrm>
+            <a:off x="548640" y="6419088"/>
+            <a:ext cx="11109960" cy="11887"/>
+          </a:xfrm>
+          <a:prstGeom prst="rect">
+            <a:avLst/>
+          </a:prstGeom>
+          <a:solidFill>
+            <a:srgbClr val="DDDDDD"/>
+          </a:solidFill>
+          <a:ln>
+            <a:noFill/>
+          </a:ln>
+          <a:effectLst/>
+        </p:spPr>
+        <p:style>
+          <a:lnRef idx="1">
+            <a:schemeClr val="accent1"/>
+          </a:lnRef>
+          <a:fillRef idx="3">
+            <a:schemeClr val="accent1"/>
+          </a:fillRef>
+          <a:effectRef idx="2">
+            <a:schemeClr val="accent1"/>
+          </a:effectRef>
+          <a:fontRef idx="minor">
+            <a:schemeClr val="lt1"/>
+          </a:fontRef>
+        </p:style>
+        <p:txBody>
+          <a:bodyPr rtlCol="0" anchor="ctr"/>
+          <a:lstStyle/>
+          <a:p>
+            <a:pPr algn="ctr"/>
+          </a:p>
+        </p:txBody>
+      </p:sp>
+      <p:sp>
+        <p:nvSpPr>
+          <p:cNvPr id="27" name="TextBox 26"/>
+          <p:cNvSpPr txBox="1"/>
+          <p:nvPr/>
+        </p:nvSpPr>
+        <p:spPr>
+          <a:xfrm>
+            <a:off x="548640" y="6483096"/>
+            <a:ext cx="7863840" cy="274320"/>
+          </a:xfrm>
+          <a:prstGeom prst="rect">
+            <a:avLst/>
+          </a:prstGeom>
+          <a:noFill/>
+        </p:spPr>
+        <p:txBody>
+          <a:bodyPr wrap="square">
+            <a:spAutoFit/>
+          </a:bodyPr>
+          <a:lstStyle/>
+          <a:p>
+            <a:pPr algn="l">
+              <a:lnSpc>
+                <a:spcPct val="115000"/>
+              </a:lnSpc>
+              <a:spcAft>
+                <a:spcPts val="400"/>
+              </a:spcAft>
+            </a:pPr>
+            <a:r>
+              <a:rPr sz="900" b="1">
+                <a:solidFill>
+                  <a:srgbClr val="000091"/>
+                </a:solidFill>
+                <a:latin typeface="Marianne"/>
+              </a:rPr>
+              <a:t>La stratégie avance à trois horizons</a:t>
+            </a:r>
+            <a:r>
+              <a:rPr sz="900" b="0">
+                <a:solidFill>
+                  <a:srgbClr val="666666"/>
+                </a:solidFill>
+                <a:latin typeface="Marianne"/>
+              </a:rPr>
+              <a:t> — outiller chaque métier, puis faire monter la pratique, puis passer à l'échelle.</a:t>
+            </a:r>
+          </a:p>
+        </p:txBody>
+      </p:sp>
+      <p:sp>
+        <p:nvSpPr>
+          <p:cNvPr id="28" name="TextBox 27"/>
+          <p:cNvSpPr txBox="1"/>
+          <p:nvPr/>
+        </p:nvSpPr>
+        <p:spPr>
+          <a:xfrm>
+            <a:off x="8503920" y="6483096"/>
+            <a:ext cx="3154680" cy="274320"/>
+          </a:xfrm>
+          <a:prstGeom prst="rect">
+            <a:avLst/>
+          </a:prstGeom>
+          <a:noFill/>
+        </p:spPr>
+        <p:txBody>
+          <a:bodyPr wrap="square">
+            <a:spAutoFit/>
+          </a:bodyPr>
+          <a:lstStyle/>
+          <a:p>
+            <a:pPr algn="r">
+              <a:lnSpc>
+                <a:spcPct val="115000"/>
+              </a:lnSpc>
+              <a:spcAft>
+                <a:spcPts val="400"/>
+              </a:spcAft>
+            </a:pPr>
+            <a:r>
+              <a:rPr sz="900" b="0">
+                <a:solidFill>
+                  <a:srgbClr val="666666"/>
+                </a:solidFill>
+                <a:latin typeface="Marianne"/>
+              </a:rPr>
+              <a:t>Accompagnement réel, demande entrante, fondations posées.</a:t>
+            </a:r>
           </a:p>
         </p:txBody>
       </p:sp>
